--- a/classes/parte-17-profundizacion-para-certificaciones/319-analisis-avanzado-de-phishing-y-correo-malicioso/clase-319-presentacion.pptx
+++ b/classes/parte-17-profundizacion-para-certificaciones/319-analisis-avanzado-de-phishing-y-correo-malicioso/clase-319-presentacion.pptx
@@ -17,6 +17,10 @@
     <p:sldId id="265" r:id="rId16"/>
     <p:sldId id="266" r:id="rId17"/>
     <p:sldId id="267" r:id="rId18"/>
+    <p:sldId id="268" r:id="rId19"/>
+    <p:sldId id="269" r:id="rId20"/>
+    <p:sldId id="270" r:id="rId21"/>
+    <p:sldId id="271" r:id="rId22"/>
   </p:sldIdLst>
   <p:sldSz cx="9144000" cy="6858000" type="screen4x3"/>
   <p:notesSz cx="6858000" cy="9144000"/>
@@ -3198,7 +3202,7 @@
                   <a:srgbClr val="0B3D2E"/>
                 </a:solidFill>
               </a:rPr>
-              <a:t>⚠️ Errores comunes</a:t>
+              <a:t>🧪 Laboratorio guiado — Análisis y triaje de un correo sospechoso</a:t>
             </a:r>
           </a:p>
         </p:txBody>
@@ -3236,82 +3240,97 @@
                   <a:srgbClr val="22282E"/>
                 </a:solidFill>
               </a:rPr>
-              <a:t>•  "SPF pasó, así que es legítimo" — SPF valida el envelope-from, no el From: visible. Verifica alineación DMARC antes de concluir.</a:t>
-            </a:r>
-          </a:p>
-          <a:p>
-            <a:pPr>
-              <a:spcAft>
-                <a:spcPts val="600"/>
-              </a:spcAft>
-            </a:pPr>
-            <a:r>
-              <a:rPr sz="1500">
-                <a:solidFill>
-                  <a:srgbClr val="22282E"/>
-                </a:solidFill>
-              </a:rPr>
-              <a:t>•  "Abrí el adjunto para ver qué era" — Detonación en el equipo real. Usa siempre VM aislada o sandbox; comparte hash, no el archivo.</a:t>
-            </a:r>
-          </a:p>
-          <a:p>
-            <a:pPr>
-              <a:spcAft>
-                <a:spcPts val="600"/>
-              </a:spcAft>
-            </a:pPr>
-            <a:r>
-              <a:rPr sz="1500">
-                <a:solidFill>
-                  <a:srgbClr val="22282E"/>
-                </a:solidFill>
-              </a:rPr>
-              <a:t>•  "Pegué la URL viva en el informe" — Riesgo de clic accidental. Defang todos los IOCs (hxxp, [.]).</a:t>
-            </a:r>
-          </a:p>
-          <a:p>
-            <a:pPr>
-              <a:spcAft>
-                <a:spcPts val="600"/>
-              </a:spcAft>
-            </a:pPr>
-            <a:r>
-              <a:rPr sz="1500">
-                <a:solidFill>
-                  <a:srgbClr val="22282E"/>
-                </a:solidFill>
-              </a:rPr>
-              <a:t>•  "Leí los Received de arriba hacia abajo" — Se leen de abajo hacia arriba: el salto inferior es el origen.</a:t>
-            </a:r>
-          </a:p>
-          <a:p>
-            <a:pPr>
-              <a:spcAft>
-                <a:spcPts val="600"/>
-              </a:spcAft>
-            </a:pPr>
-            <a:r>
-              <a:rPr sz="1500">
-                <a:solidFill>
-                  <a:srgbClr val="22282E"/>
-                </a:solidFill>
-              </a:rPr>
-              <a:t>•  "Confundo dominio real con lookalike" — Homoglyphs/IDN. Convierte a punycode y compara carácter por carácter.</a:t>
-            </a:r>
-          </a:p>
-          <a:p>
-            <a:pPr>
-              <a:spcAft>
-                <a:spcPts val="600"/>
-              </a:spcAft>
-            </a:pPr>
-            <a:r>
-              <a:rPr sz="1500">
-                <a:solidFill>
-                  <a:srgbClr val="22282E"/>
-                </a:solidFill>
-              </a:rPr>
-              <a:t>•  "Purgué solo mi buzón" — El correo llegó a muchos. Haz búsqueda y purga multi-buzón por Message-ID/asunto.</a:t>
+              <a:t>•  Ejercicio aplicado: analizarás un correo de phishing de muestra de laboratorio de punta a punta y producirás un informe de triaje con IOCs y respuesta.</a:t>
+            </a:r>
+          </a:p>
+          <a:p>
+            <a:pPr>
+              <a:spcAft>
+                <a:spcPts val="600"/>
+              </a:spcAft>
+            </a:pPr>
+            <a:r>
+              <a:rPr sz="1500">
+                <a:solidFill>
+                  <a:srgbClr val="22282E"/>
+                </a:solidFill>
+              </a:rPr>
+              <a:t>•  Obtén la muestra en crudo. Descarga el .eml/.msg (muestra de laboratorio, p. ej. de PhishTank o un ejercicio BTL1). Ábrelo como texto, no en el cliente de correo.</a:t>
+            </a:r>
+          </a:p>
+          <a:p>
+            <a:pPr>
+              <a:spcAft>
+                <a:spcPts val="600"/>
+              </a:spcAft>
+            </a:pPr>
+            <a:r>
+              <a:rPr sz="1500">
+                <a:solidFill>
+                  <a:srgbClr val="22282E"/>
+                </a:solidFill>
+              </a:rPr>
+              <a:t>•  Analiza cabeceras. Pega las cabeceras en Messageheader. Reconstruye los saltos Received (de abajo hacia arriba), identifica la IP de origen real y compara From: visible vs Return-Path.</a:t>
+            </a:r>
+          </a:p>
+          <a:p>
+            <a:pPr>
+              <a:spcAft>
+                <a:spcPts val="600"/>
+              </a:spcAft>
+            </a:pPr>
+            <a:r>
+              <a:rPr sz="1500">
+                <a:solidFill>
+                  <a:srgbClr val="22282E"/>
+                </a:solidFill>
+              </a:rPr>
+              <a:t>•  Verifica autenticación. Lee Authentication-Results: ¿SPF pass/fail? ¿DKIM pass/fail? ¿DMARC alineado? Confirma consultando dig TXT dominio y dig TXT dmarc.dominio.</a:t>
+            </a:r>
+          </a:p>
+          <a:p>
+            <a:pPr>
+              <a:spcAft>
+                <a:spcPts val="600"/>
+              </a:spcAft>
+            </a:pPr>
+            <a:r>
+              <a:rPr sz="1500">
+                <a:solidFill>
+                  <a:srgbClr val="22282E"/>
+                </a:solidFill>
+              </a:rPr>
+              <a:t>•  Evalúa el remitente. Revisa si es spoofing (SPF fail), dominio lookalike (compara letra por letra, convierte IDN a punycode) o cuenta legítima comprometida.</a:t>
+            </a:r>
+          </a:p>
+          <a:p>
+            <a:pPr>
+              <a:spcAft>
+                <a:spcPts val="600"/>
+              </a:spcAft>
+            </a:pPr>
+            <a:r>
+              <a:rPr sz="1500">
+                <a:solidFill>
+                  <a:srgbClr val="22282E"/>
+                </a:solidFill>
+              </a:rPr>
+              <a:t>•  Analiza URLs sin hacer clic. Extrae los enlaces del cuerpo, defang (hxxp://…[.]…), síguelos en URLScan.io/VirusTotal y observa redirecciones y la página final (¿formulario de credenciales?).</a:t>
+            </a:r>
+          </a:p>
+          <a:p>
+            <a:pPr>
+              <a:spcAft>
+                <a:spcPts val="600"/>
+              </a:spcAft>
+            </a:pPr>
+            <a:r>
+              <a:rPr sz="1500">
+                <a:solidFill>
+                  <a:srgbClr val="22282E"/>
+                </a:solidFill>
+              </a:rPr>
+              <a:t>•  Analiza el adjunto (en VM aislada). Calcula su SHA-256, búscalo en VirusTotal. Si es Office, ejecuta olevba para ver macros; si es PDF, pdfid. Detona en sandbox (Any.Run) solo si es muestra…</a:t>
             </a:r>
           </a:p>
         </p:txBody>
@@ -3362,7 +3381,7 @@
                   <a:srgbClr val="0B3D2E"/>
                 </a:solidFill>
               </a:rPr>
-              <a:t>❓ Preguntas frecuentes</a:t>
+              <a:t>✍️ Ejercicios</a:t>
             </a:r>
           </a:p>
         </p:txBody>
@@ -3400,97 +3419,82 @@
                   <a:srgbClr val="22282E"/>
                 </a:solidFill>
               </a:rPr>
-              <a:t>•  ❓ Si DMARC está en p=reject, ¿ya no necesito analizar correos?</a:t>
-            </a:r>
-          </a:p>
-          <a:p>
-            <a:pPr>
-              <a:spcAft>
-                <a:spcPts val="600"/>
-              </a:spcAft>
-            </a:pPr>
-            <a:r>
-              <a:rPr sz="1500">
-                <a:solidFill>
-                  <a:srgbClr val="22282E"/>
-                </a:solidFill>
-              </a:rPr>
-              <a:t>•  No. DMARC reduce el spoofing del propio dominio, pero no detiene lookalike domains, cuentas legítimas comprometidas ni BEC desde dominios externos. El análisis manual sigue siendo necesario.</a:t>
-            </a:r>
-          </a:p>
-          <a:p>
-            <a:pPr>
-              <a:spcAft>
-                <a:spcPts val="600"/>
-              </a:spcAft>
-            </a:pPr>
-            <a:r>
-              <a:rPr sz="1500">
-                <a:solidFill>
-                  <a:srgbClr val="22282E"/>
-                </a:solidFill>
-              </a:rPr>
-              <a:t>•  ❓ ¿Por qué un correo puede pasar SPF y aun así ser phishing?</a:t>
-            </a:r>
-          </a:p>
-          <a:p>
-            <a:pPr>
-              <a:spcAft>
-                <a:spcPts val="600"/>
-              </a:spcAft>
-            </a:pPr>
-            <a:r>
-              <a:rPr sz="1500">
-                <a:solidFill>
-                  <a:srgbClr val="22282E"/>
-                </a:solidFill>
-              </a:rPr>
-              <a:t>•  Porque SPF valida la IP frente al dominio del Return-Path, que el atacante controla. Si envía desde un dominio propio con SPF válido pero falsifica el From: visible, SPF pasa; solo DMARC (alineación) lo atrapa.</a:t>
-            </a:r>
-          </a:p>
-          <a:p>
-            <a:pPr>
-              <a:spcAft>
-                <a:spcPts val="600"/>
-              </a:spcAft>
-            </a:pPr>
-            <a:r>
-              <a:rPr sz="1500">
-                <a:solidFill>
-                  <a:srgbClr val="22282E"/>
-                </a:solidFill>
-              </a:rPr>
-              <a:t>•  ❓ ¿VirusTotal es seguro para cualquier adjunto?</a:t>
-            </a:r>
-          </a:p>
-          <a:p>
-            <a:pPr>
-              <a:spcAft>
-                <a:spcPts val="600"/>
-              </a:spcAft>
-            </a:pPr>
-            <a:r>
-              <a:rPr sz="1500">
-                <a:solidFill>
-                  <a:srgbClr val="22282E"/>
-                </a:solidFill>
-              </a:rPr>
-              <a:t>•  Cuidado: lo que subes queda disponible para otros suscriptores. Si el archivo puede contener datos confidenciales, busca por hash en vez de subir el archivo.</a:t>
-            </a:r>
-          </a:p>
-          <a:p>
-            <a:pPr>
-              <a:spcAft>
-                <a:spcPts val="600"/>
-              </a:spcAft>
-            </a:pPr>
-            <a:r>
-              <a:rPr sz="1500">
-                <a:solidFill>
-                  <a:srgbClr val="22282E"/>
-                </a:solidFill>
-              </a:rPr>
-              <a:t>•  ❓ ¿Qué es lo primero en un triaje?</a:t>
+              <a:t>•  Dadas unas cabeceras, indica la IP de origen real y si el From: fue suplantado.</a:t>
+            </a:r>
+          </a:p>
+          <a:p>
+            <a:pPr>
+              <a:spcAft>
+                <a:spcPts val="600"/>
+              </a:spcAft>
+            </a:pPr>
+            <a:r>
+              <a:rPr sz="1500">
+                <a:solidFill>
+                  <a:srgbClr val="22282E"/>
+                </a:solidFill>
+              </a:rPr>
+              <a:t>•  Explica un caso donde SPF pasa pero DMARC falla, y por qué.</a:t>
+            </a:r>
+          </a:p>
+          <a:p>
+            <a:pPr>
+              <a:spcAft>
+                <a:spcPts val="600"/>
+              </a:spcAft>
+            </a:pPr>
+            <a:r>
+              <a:rPr sz="1500">
+                <a:solidFill>
+                  <a:srgbClr val="22282E"/>
+                </a:solidFill>
+              </a:rPr>
+              <a:t>•  Convierte tres URLs y dos IPs a formato defanged y decodifica una URL con parámetros en Base64 usando CyberChef.</a:t>
+            </a:r>
+          </a:p>
+          <a:p>
+            <a:pPr>
+              <a:spcAft>
+                <a:spcPts val="600"/>
+              </a:spcAft>
+            </a:pPr>
+            <a:r>
+              <a:rPr sz="1500">
+                <a:solidFill>
+                  <a:srgbClr val="22282E"/>
+                </a:solidFill>
+              </a:rPr>
+              <a:t>•  Compara microsoft.com con tres dominios lookalike y detéctalos vía punycode.</a:t>
+            </a:r>
+          </a:p>
+          <a:p>
+            <a:pPr>
+              <a:spcAft>
+                <a:spcPts val="600"/>
+              </a:spcAft>
+            </a:pPr>
+            <a:r>
+              <a:rPr sz="1500">
+                <a:solidFill>
+                  <a:srgbClr val="22282E"/>
+                </a:solidFill>
+              </a:rPr>
+              <a:t>•  Redacta el playbook de respuesta a un BEC que solicita un cambio de datos bancarios a un proveedor.</a:t>
+            </a:r>
+          </a:p>
+          <a:p>
+            <a:pPr>
+              <a:spcAft>
+                <a:spcPts val="600"/>
+              </a:spcAft>
+            </a:pPr>
+            <a:r>
+              <a:rPr sz="1500">
+                <a:solidFill>
+                  <a:srgbClr val="22282E"/>
+                </a:solidFill>
+              </a:rPr>
+              <a:t>•  Extrae los IOCs de una muestra y escríbelos en una tabla lista para importar a un bloqueo.</a:t>
             </a:r>
           </a:p>
         </p:txBody>
@@ -3541,7 +3545,7 @@
                   <a:srgbClr val="0B3D2E"/>
                 </a:solidFill>
               </a:rPr>
-              <a:t>🔗 Referencias</a:t>
+              <a:t>📝 Reto verificable</a:t>
             </a:r>
           </a:p>
         </p:txBody>
@@ -3579,6 +3583,528 @@
                   <a:srgbClr val="22282E"/>
                 </a:solidFill>
               </a:rPr>
+              <a:t>•  Reto: entrega el informe de análisis completo de un correo de phishing de muestra, con veredicto justificado, tabla de IOCs defanged y plan de respuesta.</a:t>
+            </a:r>
+          </a:p>
+          <a:p>
+            <a:pPr>
+              <a:spcAft>
+                <a:spcPts val="600"/>
+              </a:spcAft>
+            </a:pPr>
+            <a:r>
+              <a:rPr sz="1500">
+                <a:solidFill>
+                  <a:srgbClr val="22282E"/>
+                </a:solidFill>
+              </a:rPr>
+              <a:t>•  Criterio de aceptación:</a:t>
+            </a:r>
+          </a:p>
+          <a:p>
+            <a:pPr>
+              <a:spcAft>
+                <a:spcPts val="600"/>
+              </a:spcAft>
+            </a:pPr>
+            <a:r>
+              <a:rPr sz="1500">
+                <a:solidFill>
+                  <a:srgbClr val="22282E"/>
+                </a:solidFill>
+              </a:rPr>
+              <a:t>•  Se determina la IP/origen real desde las cabeceras y se contrasta From: vs Return-Path.</a:t>
+            </a:r>
+          </a:p>
+          <a:p>
+            <a:pPr>
+              <a:spcAft>
+                <a:spcPts val="600"/>
+              </a:spcAft>
+            </a:pPr>
+            <a:r>
+              <a:rPr sz="1500">
+                <a:solidFill>
+                  <a:srgbClr val="22282E"/>
+                </a:solidFill>
+              </a:rPr>
+              <a:t>•  Se interpretan correctamente SPF, DKIM y DMARC (incluyendo el caso "SPF pass pero DMARC fail").</a:t>
+            </a:r>
+          </a:p>
+          <a:p>
+            <a:pPr>
+              <a:spcAft>
+                <a:spcPts val="600"/>
+              </a:spcAft>
+            </a:pPr>
+            <a:r>
+              <a:rPr sz="1500">
+                <a:solidFill>
+                  <a:srgbClr val="22282E"/>
+                </a:solidFill>
+              </a:rPr>
+              <a:t>•  Todos los IOCs se presentan defanged; ningún enlace vivo en el informe.</a:t>
+            </a:r>
+          </a:p>
+          <a:p>
+            <a:pPr>
+              <a:spcAft>
+                <a:spcPts val="600"/>
+              </a:spcAft>
+            </a:pPr>
+            <a:r>
+              <a:rPr sz="1500">
+                <a:solidFill>
+                  <a:srgbClr val="22282E"/>
+                </a:solidFill>
+              </a:rPr>
+              <a:t>•  El plan de respuesta incluye contención (purga), bloqueo de IOCs y acción sobre usuarios afectados.</a:t>
+            </a:r>
+          </a:p>
+          <a:p>
+            <a:pPr>
+              <a:spcAft>
+                <a:spcPts val="600"/>
+              </a:spcAft>
+            </a:pPr>
+            <a:r>
+              <a:rPr sz="1500">
+                <a:solidFill>
+                  <a:srgbClr val="22282E"/>
+                </a:solidFill>
+              </a:rPr>
+              <a:t>•  El análisis de adjunto/URL se hizo en entorno aislado (queda documentado).</a:t>
+            </a:r>
+          </a:p>
+        </p:txBody>
+      </p:sp>
+    </p:spTree>
+  </p:cSld>
+  <p:clrMapOvr>
+    <a:masterClrMapping/>
+  </p:clrMapOvr>
+</p:sld>
+</file>
+
+<file path=ppt/slides/slide13.xml><?xml version="1.0" encoding="utf-8"?>
+<p:sld xmlns:a="http://schemas.openxmlformats.org/drawingml/2006/main" xmlns:p="http://schemas.openxmlformats.org/presentationml/2006/main" xmlns:r="http://schemas.openxmlformats.org/officeDocument/2006/relationships">
+  <p:cSld>
+    <p:spTree>
+      <p:nvGrpSpPr>
+        <p:cNvPr id="1" name=""/>
+        <p:cNvGrpSpPr/>
+        <p:nvPr/>
+      </p:nvGrpSpPr>
+      <p:grpSpPr/>
+      <p:sp>
+        <p:nvSpPr>
+          <p:cNvPr id="2" name="TextBox 1"/>
+          <p:cNvSpPr txBox="1"/>
+          <p:nvPr/>
+        </p:nvSpPr>
+        <p:spPr>
+          <a:xfrm>
+            <a:off x="457200" y="320040"/>
+            <a:ext cx="8229600" cy="822960"/>
+          </a:xfrm>
+          <a:prstGeom prst="rect">
+            <a:avLst/>
+          </a:prstGeom>
+          <a:noFill/>
+        </p:spPr>
+        <p:txBody>
+          <a:bodyPr wrap="square">
+            <a:spAutoFit/>
+          </a:bodyPr>
+          <a:lstStyle/>
+          <a:p>
+            <a:r>
+              <a:rPr sz="2600" b="1">
+                <a:solidFill>
+                  <a:srgbClr val="0B3D2E"/>
+                </a:solidFill>
+              </a:rPr>
+              <a:t>⚠️ Errores comunes</a:t>
+            </a:r>
+          </a:p>
+        </p:txBody>
+      </p:sp>
+      <p:sp>
+        <p:nvSpPr>
+          <p:cNvPr id="3" name="TextBox 2"/>
+          <p:cNvSpPr txBox="1"/>
+          <p:nvPr/>
+        </p:nvSpPr>
+        <p:spPr>
+          <a:xfrm>
+            <a:off x="457200" y="1280160"/>
+            <a:ext cx="8229600" cy="4937760"/>
+          </a:xfrm>
+          <a:prstGeom prst="rect">
+            <a:avLst/>
+          </a:prstGeom>
+          <a:noFill/>
+        </p:spPr>
+        <p:txBody>
+          <a:bodyPr wrap="square">
+            <a:spAutoFit/>
+          </a:bodyPr>
+          <a:lstStyle/>
+          <a:p>
+            <a:pPr>
+              <a:spcAft>
+                <a:spcPts val="600"/>
+              </a:spcAft>
+            </a:pPr>
+            <a:r>
+              <a:rPr sz="1500">
+                <a:solidFill>
+                  <a:srgbClr val="22282E"/>
+                </a:solidFill>
+              </a:rPr>
+              <a:t>•  "SPF pasó, así que es legítimo" — SPF valida el envelope-from, no el From: visible. Verifica alineación DMARC antes de concluir.</a:t>
+            </a:r>
+          </a:p>
+          <a:p>
+            <a:pPr>
+              <a:spcAft>
+                <a:spcPts val="600"/>
+              </a:spcAft>
+            </a:pPr>
+            <a:r>
+              <a:rPr sz="1500">
+                <a:solidFill>
+                  <a:srgbClr val="22282E"/>
+                </a:solidFill>
+              </a:rPr>
+              <a:t>•  "Abrí el adjunto para ver qué era" — Detonación en el equipo real. Usa siempre VM aislada o sandbox; comparte hash, no el archivo.</a:t>
+            </a:r>
+          </a:p>
+          <a:p>
+            <a:pPr>
+              <a:spcAft>
+                <a:spcPts val="600"/>
+              </a:spcAft>
+            </a:pPr>
+            <a:r>
+              <a:rPr sz="1500">
+                <a:solidFill>
+                  <a:srgbClr val="22282E"/>
+                </a:solidFill>
+              </a:rPr>
+              <a:t>•  "Pegué la URL viva en el informe" — Riesgo de clic accidental. Defang todos los IOCs (hxxp, [.]).</a:t>
+            </a:r>
+          </a:p>
+          <a:p>
+            <a:pPr>
+              <a:spcAft>
+                <a:spcPts val="600"/>
+              </a:spcAft>
+            </a:pPr>
+            <a:r>
+              <a:rPr sz="1500">
+                <a:solidFill>
+                  <a:srgbClr val="22282E"/>
+                </a:solidFill>
+              </a:rPr>
+              <a:t>•  "Leí los Received de arriba hacia abajo" — Se leen de abajo hacia arriba: el salto inferior es el origen.</a:t>
+            </a:r>
+          </a:p>
+          <a:p>
+            <a:pPr>
+              <a:spcAft>
+                <a:spcPts val="600"/>
+              </a:spcAft>
+            </a:pPr>
+            <a:r>
+              <a:rPr sz="1500">
+                <a:solidFill>
+                  <a:srgbClr val="22282E"/>
+                </a:solidFill>
+              </a:rPr>
+              <a:t>•  "Confundo dominio real con lookalike" — Homoglyphs/IDN. Convierte a punycode y compara carácter por carácter.</a:t>
+            </a:r>
+          </a:p>
+          <a:p>
+            <a:pPr>
+              <a:spcAft>
+                <a:spcPts val="600"/>
+              </a:spcAft>
+            </a:pPr>
+            <a:r>
+              <a:rPr sz="1500">
+                <a:solidFill>
+                  <a:srgbClr val="22282E"/>
+                </a:solidFill>
+              </a:rPr>
+              <a:t>•  "Purgué solo mi buzón" — El correo llegó a muchos. Haz búsqueda y purga multi-buzón por Message-ID/asunto.</a:t>
+            </a:r>
+          </a:p>
+        </p:txBody>
+      </p:sp>
+    </p:spTree>
+  </p:cSld>
+  <p:clrMapOvr>
+    <a:masterClrMapping/>
+  </p:clrMapOvr>
+</p:sld>
+</file>
+
+<file path=ppt/slides/slide14.xml><?xml version="1.0" encoding="utf-8"?>
+<p:sld xmlns:a="http://schemas.openxmlformats.org/drawingml/2006/main" xmlns:p="http://schemas.openxmlformats.org/presentationml/2006/main" xmlns:r="http://schemas.openxmlformats.org/officeDocument/2006/relationships">
+  <p:cSld>
+    <p:spTree>
+      <p:nvGrpSpPr>
+        <p:cNvPr id="1" name=""/>
+        <p:cNvGrpSpPr/>
+        <p:nvPr/>
+      </p:nvGrpSpPr>
+      <p:grpSpPr/>
+      <p:sp>
+        <p:nvSpPr>
+          <p:cNvPr id="2" name="TextBox 1"/>
+          <p:cNvSpPr txBox="1"/>
+          <p:nvPr/>
+        </p:nvSpPr>
+        <p:spPr>
+          <a:xfrm>
+            <a:off x="457200" y="320040"/>
+            <a:ext cx="8229600" cy="822960"/>
+          </a:xfrm>
+          <a:prstGeom prst="rect">
+            <a:avLst/>
+          </a:prstGeom>
+          <a:noFill/>
+        </p:spPr>
+        <p:txBody>
+          <a:bodyPr wrap="square">
+            <a:spAutoFit/>
+          </a:bodyPr>
+          <a:lstStyle/>
+          <a:p>
+            <a:r>
+              <a:rPr sz="2600" b="1">
+                <a:solidFill>
+                  <a:srgbClr val="0B3D2E"/>
+                </a:solidFill>
+              </a:rPr>
+              <a:t>❓ Preguntas frecuentes</a:t>
+            </a:r>
+          </a:p>
+        </p:txBody>
+      </p:sp>
+      <p:sp>
+        <p:nvSpPr>
+          <p:cNvPr id="3" name="TextBox 2"/>
+          <p:cNvSpPr txBox="1"/>
+          <p:nvPr/>
+        </p:nvSpPr>
+        <p:spPr>
+          <a:xfrm>
+            <a:off x="457200" y="1280160"/>
+            <a:ext cx="8229600" cy="4937760"/>
+          </a:xfrm>
+          <a:prstGeom prst="rect">
+            <a:avLst/>
+          </a:prstGeom>
+          <a:noFill/>
+        </p:spPr>
+        <p:txBody>
+          <a:bodyPr wrap="square">
+            <a:spAutoFit/>
+          </a:bodyPr>
+          <a:lstStyle/>
+          <a:p>
+            <a:pPr>
+              <a:spcAft>
+                <a:spcPts val="600"/>
+              </a:spcAft>
+            </a:pPr>
+            <a:r>
+              <a:rPr sz="1500">
+                <a:solidFill>
+                  <a:srgbClr val="22282E"/>
+                </a:solidFill>
+              </a:rPr>
+              <a:t>•  ❓ Si DMARC está en p=reject, ¿ya no necesito analizar correos?</a:t>
+            </a:r>
+          </a:p>
+          <a:p>
+            <a:pPr>
+              <a:spcAft>
+                <a:spcPts val="600"/>
+              </a:spcAft>
+            </a:pPr>
+            <a:r>
+              <a:rPr sz="1500">
+                <a:solidFill>
+                  <a:srgbClr val="22282E"/>
+                </a:solidFill>
+              </a:rPr>
+              <a:t>•  No. DMARC reduce el spoofing del propio dominio, pero no detiene lookalike domains, cuentas legítimas comprometidas ni BEC desde dominios externos. El análisis manual sigue siendo necesario.</a:t>
+            </a:r>
+          </a:p>
+          <a:p>
+            <a:pPr>
+              <a:spcAft>
+                <a:spcPts val="600"/>
+              </a:spcAft>
+            </a:pPr>
+            <a:r>
+              <a:rPr sz="1500">
+                <a:solidFill>
+                  <a:srgbClr val="22282E"/>
+                </a:solidFill>
+              </a:rPr>
+              <a:t>•  ❓ ¿Por qué un correo puede pasar SPF y aun así ser phishing?</a:t>
+            </a:r>
+          </a:p>
+          <a:p>
+            <a:pPr>
+              <a:spcAft>
+                <a:spcPts val="600"/>
+              </a:spcAft>
+            </a:pPr>
+            <a:r>
+              <a:rPr sz="1500">
+                <a:solidFill>
+                  <a:srgbClr val="22282E"/>
+                </a:solidFill>
+              </a:rPr>
+              <a:t>•  Porque SPF valida la IP frente al dominio del Return-Path, que el atacante controla. Si envía desde un dominio propio con SPF válido pero falsifica el From: visible, SPF pasa; solo DMARC (alineación)…</a:t>
+            </a:r>
+          </a:p>
+          <a:p>
+            <a:pPr>
+              <a:spcAft>
+                <a:spcPts val="600"/>
+              </a:spcAft>
+            </a:pPr>
+            <a:r>
+              <a:rPr sz="1500">
+                <a:solidFill>
+                  <a:srgbClr val="22282E"/>
+                </a:solidFill>
+              </a:rPr>
+              <a:t>•  ❓ ¿VirusTotal es seguro para cualquier adjunto?</a:t>
+            </a:r>
+          </a:p>
+          <a:p>
+            <a:pPr>
+              <a:spcAft>
+                <a:spcPts val="600"/>
+              </a:spcAft>
+            </a:pPr>
+            <a:r>
+              <a:rPr sz="1500">
+                <a:solidFill>
+                  <a:srgbClr val="22282E"/>
+                </a:solidFill>
+              </a:rPr>
+              <a:t>•  Cuidado: lo que subes queda disponible para otros suscriptores. Si el archivo puede contener datos confidenciales, busca por hash en vez de subir el archivo.</a:t>
+            </a:r>
+          </a:p>
+          <a:p>
+            <a:pPr>
+              <a:spcAft>
+                <a:spcPts val="600"/>
+              </a:spcAft>
+            </a:pPr>
+            <a:r>
+              <a:rPr sz="1500">
+                <a:solidFill>
+                  <a:srgbClr val="22282E"/>
+                </a:solidFill>
+              </a:rPr>
+              <a:t>•  ❓ ¿Qué es lo primero en un triaje?</a:t>
+            </a:r>
+          </a:p>
+        </p:txBody>
+      </p:sp>
+    </p:spTree>
+  </p:cSld>
+  <p:clrMapOvr>
+    <a:masterClrMapping/>
+  </p:clrMapOvr>
+</p:sld>
+</file>
+
+<file path=ppt/slides/slide15.xml><?xml version="1.0" encoding="utf-8"?>
+<p:sld xmlns:a="http://schemas.openxmlformats.org/drawingml/2006/main" xmlns:p="http://schemas.openxmlformats.org/presentationml/2006/main" xmlns:r="http://schemas.openxmlformats.org/officeDocument/2006/relationships">
+  <p:cSld>
+    <p:spTree>
+      <p:nvGrpSpPr>
+        <p:cNvPr id="1" name=""/>
+        <p:cNvGrpSpPr/>
+        <p:nvPr/>
+      </p:nvGrpSpPr>
+      <p:grpSpPr/>
+      <p:sp>
+        <p:nvSpPr>
+          <p:cNvPr id="2" name="TextBox 1"/>
+          <p:cNvSpPr txBox="1"/>
+          <p:nvPr/>
+        </p:nvSpPr>
+        <p:spPr>
+          <a:xfrm>
+            <a:off x="457200" y="320040"/>
+            <a:ext cx="8229600" cy="822960"/>
+          </a:xfrm>
+          <a:prstGeom prst="rect">
+            <a:avLst/>
+          </a:prstGeom>
+          <a:noFill/>
+        </p:spPr>
+        <p:txBody>
+          <a:bodyPr wrap="square">
+            <a:spAutoFit/>
+          </a:bodyPr>
+          <a:lstStyle/>
+          <a:p>
+            <a:r>
+              <a:rPr sz="2600" b="1">
+                <a:solidFill>
+                  <a:srgbClr val="0B3D2E"/>
+                </a:solidFill>
+              </a:rPr>
+              <a:t>🔗 Referencias</a:t>
+            </a:r>
+          </a:p>
+        </p:txBody>
+      </p:sp>
+      <p:sp>
+        <p:nvSpPr>
+          <p:cNvPr id="3" name="TextBox 2"/>
+          <p:cNvSpPr txBox="1"/>
+          <p:nvPr/>
+        </p:nvSpPr>
+        <p:spPr>
+          <a:xfrm>
+            <a:off x="457200" y="1280160"/>
+            <a:ext cx="8229600" cy="4937760"/>
+          </a:xfrm>
+          <a:prstGeom prst="rect">
+            <a:avLst/>
+          </a:prstGeom>
+          <a:noFill/>
+        </p:spPr>
+        <p:txBody>
+          <a:bodyPr wrap="square">
+            <a:spAutoFit/>
+          </a:bodyPr>
+          <a:lstStyle/>
+          <a:p>
+            <a:pPr>
+              <a:spcAft>
+                <a:spcPts val="600"/>
+              </a:spcAft>
+            </a:pPr>
+            <a:r>
+              <a:rPr sz="1500">
+                <a:solidFill>
+                  <a:srgbClr val="22282E"/>
+                </a:solidFill>
+              </a:rPr>
               <a:t>•  Security Blue Team. BTL1 — Phishing Analysis — securityblue.team.</a:t>
             </a:r>
           </a:p>
@@ -3644,6 +4170,81 @@
           </a:p>
         </p:txBody>
       </p:sp>
+    </p:spTree>
+  </p:cSld>
+  <p:clrMapOvr>
+    <a:masterClrMapping/>
+  </p:clrMapOvr>
+</p:sld>
+</file>
+
+<file path=ppt/slides/slide16.xml><?xml version="1.0" encoding="utf-8"?>
+<p:sld xmlns:a="http://schemas.openxmlformats.org/drawingml/2006/main" xmlns:p="http://schemas.openxmlformats.org/presentationml/2006/main" xmlns:r="http://schemas.openxmlformats.org/officeDocument/2006/relationships">
+  <p:cSld>
+    <p:spTree>
+      <p:nvGrpSpPr>
+        <p:cNvPr id="1" name=""/>
+        <p:cNvGrpSpPr/>
+        <p:nvPr/>
+      </p:nvGrpSpPr>
+      <p:grpSpPr/>
+      <p:sp>
+        <p:nvSpPr>
+          <p:cNvPr id="2" name="TextBox 1"/>
+          <p:cNvSpPr txBox="1"/>
+          <p:nvPr/>
+        </p:nvSpPr>
+        <p:spPr>
+          <a:xfrm>
+            <a:off x="457200" y="274320"/>
+            <a:ext cx="8229600" cy="640080"/>
+          </a:xfrm>
+          <a:prstGeom prst="rect">
+            <a:avLst/>
+          </a:prstGeom>
+          <a:noFill/>
+        </p:spPr>
+        <p:txBody>
+          <a:bodyPr wrap="square">
+            <a:spAutoFit/>
+          </a:bodyPr>
+          <a:lstStyle/>
+          <a:p>
+            <a:r>
+              <a:rPr sz="2200" b="1">
+                <a:solidFill>
+                  <a:srgbClr val="0B3D2E"/>
+                </a:solidFill>
+              </a:rPr>
+              <a:t>Diagrama de la clase</a:t>
+            </a:r>
+          </a:p>
+        </p:txBody>
+      </p:sp>
+      <p:pic>
+        <p:nvPicPr>
+          <p:cNvPr id="3" name="Picture 2" descr="ffc711a88266f21d.png"/>
+          <p:cNvPicPr>
+            <a:picLocks noChangeAspect="1"/>
+          </p:cNvPicPr>
+          <p:nvPr/>
+        </p:nvPicPr>
+        <p:blipFill>
+          <a:blip r:embed="rId2"/>
+          <a:stretch>
+            <a:fillRect/>
+          </a:stretch>
+        </p:blipFill>
+        <p:spPr>
+          <a:xfrm>
+            <a:off x="457200" y="3330991"/>
+            <a:ext cx="8229600" cy="836098"/>
+          </a:xfrm>
+          <a:prstGeom prst="rect">
+            <a:avLst/>
+          </a:prstGeom>
+        </p:spPr>
+      </p:pic>
     </p:spTree>
   </p:cSld>
   <p:clrMapOvr>
@@ -3728,7 +4329,7 @@
                   <a:srgbClr val="22282E"/>
                 </a:solidFill>
               </a:rPr>
-              <a:t>•  Analizar correos sospechosos como lo hace un analista SOC: leer cabeceras, verificar autenticación SPF/DKIM/DMARC, examinar URLs y adjuntos de forma segura, hacer triaje por indicadores y ejecutar la respuesta (contención, purga, bloqueo, reporte). Es una clase defensiva alineada con el módulo de Phishing Analysis de BTL1 y el dominio de amenazas de Security+.</a:t>
+              <a:t>•  Analizar correos sospechosos como lo hace un analista SOC: leer cabeceras, verificar autenticación SPF/DKIM/DMARC, examinar URLs y adjuntos de forma segura, hacer triaje por indicadores y ejecutar la…</a:t>
             </a:r>
           </a:p>
         </p:txBody>
@@ -4122,7 +4723,7 @@
                   <a:srgbClr val="0B3D2E"/>
                 </a:solidFill>
               </a:rPr>
-              <a:t>📖 Definiciones y características</a:t>
+              <a:t>🧠 Modelo mental y caso de decisión</a:t>
             </a:r>
           </a:p>
         </p:txBody>
@@ -4160,97 +4761,22 @@
                   <a:srgbClr val="22282E"/>
                 </a:solidFill>
               </a:rPr>
-              <a:t>•  Cabeceras de correo: metadatos del mensaje. Received (saltos MTA, se leen de abajo hacia arriba), Return-Path (dónde rebotan), Authentication-Results (veredicto SPF/DKIM/DMARC), Message-ID. Característica clave: revelan el origen real y la ruta, difíciles de falsificar todos a la vez.</a:t>
-            </a:r>
-          </a:p>
-          <a:p>
-            <a:pPr>
-              <a:spcAft>
-                <a:spcPts val="600"/>
-              </a:spcAft>
-            </a:pPr>
-            <a:r>
-              <a:rPr sz="1500">
-                <a:solidFill>
-                  <a:srgbClr val="22282E"/>
-                </a:solidFill>
-              </a:rPr>
-              <a:t>•  SPF (Sender Policy Framework): registro DNS TXT que lista qué IPs pueden enviar por un dominio. Verifica el envelope-from (Return-Path). Característica clave: valida IP de envío, no el "De:" visible → puede pasar y seguir siendo fraude.</a:t>
-            </a:r>
-          </a:p>
-          <a:p>
-            <a:pPr>
-              <a:spcAft>
-                <a:spcPts val="600"/>
-              </a:spcAft>
-            </a:pPr>
-            <a:r>
-              <a:rPr sz="1500">
-                <a:solidFill>
-                  <a:srgbClr val="22282E"/>
-                </a:solidFill>
-              </a:rPr>
-              <a:t>•  DKIM (DomainKeys Identified Mail): firma criptográfica de partes del mensaje verificable con clave pública en DNS. Característica clave: prueba integridad y que el dominio firmante autorizó el envío.</a:t>
-            </a:r>
-          </a:p>
-          <a:p>
-            <a:pPr>
-              <a:spcAft>
-                <a:spcPts val="600"/>
-              </a:spcAft>
-            </a:pPr>
-            <a:r>
-              <a:rPr sz="1500">
-                <a:solidFill>
-                  <a:srgbClr val="22282E"/>
-                </a:solidFill>
-              </a:rPr>
-              <a:t>•  DMARC: política que alinea el dominio del "De:" visible con SPF y/o DKIM e indica qué hacer si falla (none/quarantine/reject), más reportes. Característica clave: cierra el hueco de SPF/DKIM al exigir alineación con el remitente visible.</a:t>
-            </a:r>
-          </a:p>
-          <a:p>
-            <a:pPr>
-              <a:spcAft>
-                <a:spcPts val="600"/>
-              </a:spcAft>
-            </a:pPr>
-            <a:r>
-              <a:rPr sz="1500">
-                <a:solidFill>
-                  <a:srgbClr val="22282E"/>
-                </a:solidFill>
-              </a:rPr>
-              <a:t>•  Defanging: neutralizar un IOC para compartirlo sin riesgo de clic accidental: hxxp://malo[.]com, 1.2.3[.]4. Característica clave: seguridad al documentar.</a:t>
-            </a:r>
-          </a:p>
-          <a:p>
-            <a:pPr>
-              <a:spcAft>
-                <a:spcPts val="600"/>
-              </a:spcAft>
-            </a:pPr>
-            <a:r>
-              <a:rPr sz="1500">
-                <a:solidFill>
-                  <a:srgbClr val="22282E"/>
-                </a:solidFill>
-              </a:rPr>
-              <a:t>•  Homoglyph / lookalike domain: dominio visualmente similar (paypa1.com, rnicrosoft.com, IDN con cirílico). Característica clave: engaña la lectura rápida; se detecta con punycode/whois.</a:t>
-            </a:r>
-          </a:p>
-          <a:p>
-            <a:pPr>
-              <a:spcAft>
-                <a:spcPts val="600"/>
-              </a:spcAft>
-            </a:pPr>
-            <a:r>
-              <a:rPr sz="1500">
-                <a:solidFill>
-                  <a:srgbClr val="22282E"/>
-                </a:solidFill>
-              </a:rPr>
-              <a:t>•  BEC (Business Email Compromise): fraude sin malware que suplanta a un ejecutivo/proveedor para desviar pagos. Característica clave: alto impacto financiero, a menudo sin enlaces ni adjuntos, difícil de detectar por filtros.</a:t>
+              <a:t>•  El análisis conserva mensaje original, cabeceras, autenticación, URLs, adjuntos y contexto antes de atribuir intención.</a:t>
+            </a:r>
+          </a:p>
+          <a:p>
+            <a:pPr>
+              <a:spcAft>
+                <a:spcPts val="600"/>
+              </a:spcAft>
+            </a:pPr>
+            <a:r>
+              <a:rPr sz="1500">
+                <a:solidFill>
+                  <a:srgbClr val="22282E"/>
+                </a:solidFill>
+              </a:rPr>
+              <a:t>•  Caso razonado. SPF pasa porque el atacante usa dominio propio; autenticación de dominio no significa legitimidad.</a:t>
             </a:r>
           </a:p>
         </p:txBody>
@@ -4301,7 +4827,7 @@
                   <a:srgbClr val="0B3D2E"/>
                 </a:solidFill>
               </a:rPr>
-              <a:t>🧰 Herramientas y preparación</a:t>
+              <a:t>📔 Glosario operativo complementario</a:t>
             </a:r>
           </a:p>
         </p:txBody>
@@ -4339,97 +4865,52 @@
                   <a:srgbClr val="22282E"/>
                 </a:solidFill>
               </a:rPr>
-              <a:t>•  Laboratorio aislado para análisis seguro:</a:t>
-            </a:r>
-          </a:p>
-          <a:p>
-            <a:pPr>
-              <a:spcAft>
-                <a:spcPts val="600"/>
-              </a:spcAft>
-            </a:pPr>
-            <a:r>
-              <a:rPr sz="1500">
-                <a:solidFill>
-                  <a:srgbClr val="22282E"/>
-                </a:solidFill>
-              </a:rPr>
-              <a:t>•  VM aislada (VirtualBox/Hyper-V, red host-only o sin red) para detonar adjuntos.</a:t>
-            </a:r>
-          </a:p>
-          <a:p>
-            <a:pPr>
-              <a:spcAft>
-                <a:spcPts val="600"/>
-              </a:spcAft>
-            </a:pPr>
-            <a:r>
-              <a:rPr sz="1500">
-                <a:solidFill>
-                  <a:srgbClr val="22282E"/>
-                </a:solidFill>
-              </a:rPr>
-              <a:t>•  Análisis de cabeceras: Google Admin Toolbox Messageheader o MXToolbox; visor de .eml/.msg.</a:t>
-            </a:r>
-          </a:p>
-          <a:p>
-            <a:pPr>
-              <a:spcAft>
-                <a:spcPts val="600"/>
-              </a:spcAft>
-            </a:pPr>
-            <a:r>
-              <a:rPr sz="1500">
-                <a:solidFill>
-                  <a:srgbClr val="22282E"/>
-                </a:solidFill>
-              </a:rPr>
-              <a:t>•  URLs/archivos: VirusTotal, URLScan.io, Any.Run o [Joe Sandbox] para detonación en sandbox.</a:t>
-            </a:r>
-          </a:p>
-          <a:p>
-            <a:pPr>
-              <a:spcAft>
-                <a:spcPts val="600"/>
-              </a:spcAft>
-            </a:pPr>
-            <a:r>
-              <a:rPr sz="1500">
-                <a:solidFill>
-                  <a:srgbClr val="22282E"/>
-                </a:solidFill>
-              </a:rPr>
-              <a:t>•  Hashing: sha256sum / Get-FileHash para huella del adjunto (comparte el hash, no el archivo).</a:t>
-            </a:r>
-          </a:p>
-          <a:p>
-            <a:pPr>
-              <a:spcAft>
-                <a:spcPts val="600"/>
-              </a:spcAft>
-            </a:pPr>
-            <a:r>
-              <a:rPr sz="1500">
-                <a:solidFill>
-                  <a:srgbClr val="22282E"/>
-                </a:solidFill>
-              </a:rPr>
-              <a:t>•  Inspección de DNS: dig TXT dominio para leer SPF/DMARC; nslookup.</a:t>
-            </a:r>
-          </a:p>
-          <a:p>
-            <a:pPr>
-              <a:spcAft>
-                <a:spcPts val="600"/>
-              </a:spcAft>
-            </a:pPr>
-            <a:r>
-              <a:rPr sz="1500">
-                <a:solidFill>
-                  <a:srgbClr val="22282E"/>
-                </a:solidFill>
-              </a:rPr>
-              <a:t>•  Extracción: oletools (olevba) para macros de Office, pdfid/pdf-parser para PDFs, CyberChef para decodificar/defang.</a:t>
+              <a:t>•  Término — Definición</a:t>
+            </a:r>
+          </a:p>
+          <a:p>
+            <a:pPr>
+              <a:spcAft>
+                <a:spcPts val="600"/>
+              </a:spcAft>
+            </a:pPr>
+            <a:r>
+              <a:rPr sz="1500">
+                <a:solidFill>
+                  <a:srgbClr val="22282E"/>
+                </a:solidFill>
+              </a:rPr>
+              <a:t>•  Evidencia — Información cuya procedencia y relación con un criterio pueden revisarse.</a:t>
+            </a:r>
+          </a:p>
+          <a:p>
+            <a:pPr>
+              <a:spcAft>
+                <a:spcPts val="600"/>
+              </a:spcAft>
+            </a:pPr>
+            <a:r>
+              <a:rPr sz="1500">
+                <a:solidFill>
+                  <a:srgbClr val="22282E"/>
+                </a:solidFill>
+              </a:rPr>
+              <a:t>•  Supuesto — Condición declarada de la que depende una conclusión.</a:t>
+            </a:r>
+          </a:p>
+          <a:p>
+            <a:pPr>
+              <a:spcAft>
+                <a:spcPts val="600"/>
+              </a:spcAft>
+            </a:pPr>
+            <a:r>
+              <a:rPr sz="1500">
+                <a:solidFill>
+                  <a:srgbClr val="22282E"/>
+                </a:solidFill>
+              </a:rPr>
+              <a:t>•  Riesgo residual — Exposición que permanece después del tratamiento.</a:t>
             </a:r>
           </a:p>
         </p:txBody>
@@ -4480,7 +4961,7 @@
                   <a:srgbClr val="0B3D2E"/>
                 </a:solidFill>
               </a:rPr>
-              <a:t>🧪 Laboratorio guiado — Análisis y triaje de un correo sospechoso</a:t>
+              <a:t>✅ Criterio de dominio</a:t>
             </a:r>
           </a:p>
         </p:txBody>
@@ -4518,97 +4999,7 @@
                   <a:srgbClr val="22282E"/>
                 </a:solidFill>
               </a:rPr>
-              <a:t>•  Ejercicio aplicado: analizarás un correo de phishing de muestra de laboratorio de punta a punta y producirás un informe de triaje con IOCs y respuesta.</a:t>
-            </a:r>
-          </a:p>
-          <a:p>
-            <a:pPr>
-              <a:spcAft>
-                <a:spcPts val="600"/>
-              </a:spcAft>
-            </a:pPr>
-            <a:r>
-              <a:rPr sz="1500">
-                <a:solidFill>
-                  <a:srgbClr val="22282E"/>
-                </a:solidFill>
-              </a:rPr>
-              <a:t>•  Obtén la muestra en crudo. Descarga el .eml/.msg (muestra de laboratorio, p. ej. de PhishTank o un ejercicio BTL1). Ábrelo como texto, no en el cliente de correo.</a:t>
-            </a:r>
-          </a:p>
-          <a:p>
-            <a:pPr>
-              <a:spcAft>
-                <a:spcPts val="600"/>
-              </a:spcAft>
-            </a:pPr>
-            <a:r>
-              <a:rPr sz="1500">
-                <a:solidFill>
-                  <a:srgbClr val="22282E"/>
-                </a:solidFill>
-              </a:rPr>
-              <a:t>•  Analiza cabeceras. Pega las cabeceras en Messageheader. Reconstruye los saltos Received (de abajo hacia arriba), identifica la IP de origen real y compara From: visible vs Return-Path.</a:t>
-            </a:r>
-          </a:p>
-          <a:p>
-            <a:pPr>
-              <a:spcAft>
-                <a:spcPts val="600"/>
-              </a:spcAft>
-            </a:pPr>
-            <a:r>
-              <a:rPr sz="1500">
-                <a:solidFill>
-                  <a:srgbClr val="22282E"/>
-                </a:solidFill>
-              </a:rPr>
-              <a:t>•  Verifica autenticación. Lee Authentication-Results: ¿SPF pass/fail? ¿DKIM pass/fail? ¿DMARC alineado? Confirma consultando dig TXT dominio y dig TXT dmarc.dominio.</a:t>
-            </a:r>
-          </a:p>
-          <a:p>
-            <a:pPr>
-              <a:spcAft>
-                <a:spcPts val="600"/>
-              </a:spcAft>
-            </a:pPr>
-            <a:r>
-              <a:rPr sz="1500">
-                <a:solidFill>
-                  <a:srgbClr val="22282E"/>
-                </a:solidFill>
-              </a:rPr>
-              <a:t>•  Evalúa el remitente. Revisa si es spoofing (SPF fail), dominio lookalike (compara letra por letra, convierte IDN a punycode) o cuenta legítima comprometida.</a:t>
-            </a:r>
-          </a:p>
-          <a:p>
-            <a:pPr>
-              <a:spcAft>
-                <a:spcPts val="600"/>
-              </a:spcAft>
-            </a:pPr>
-            <a:r>
-              <a:rPr sz="1500">
-                <a:solidFill>
-                  <a:srgbClr val="22282E"/>
-                </a:solidFill>
-              </a:rPr>
-              <a:t>•  Analiza URLs sin hacer clic. Extrae los enlaces del cuerpo, defang (hxxp://…[.]…), síguelos en URLScan.io/VirusTotal y observa redirecciones y la página final (¿formulario de credenciales?).</a:t>
-            </a:r>
-          </a:p>
-          <a:p>
-            <a:pPr>
-              <a:spcAft>
-                <a:spcPts val="600"/>
-              </a:spcAft>
-            </a:pPr>
-            <a:r>
-              <a:rPr sz="1500">
-                <a:solidFill>
-                  <a:srgbClr val="22282E"/>
-                </a:solidFill>
-              </a:rPr>
-              <a:t>•  Analiza el adjunto (en VM aislada). Calcula su SHA-256, búscalo en VirusTotal. Si es Office, ejecuta olevba para ver macros; si es PDF, pdfid. Detona en sandbox (Any.Run) solo si es muestra autorizada.</a:t>
+              <a:t>•  El alumno demuestra dominio cuando explica el diagrama, resuelve el caso con evidencia, declara límites y puede defender por qué su decisión cambia si cambia un supuesto.</a:t>
             </a:r>
           </a:p>
         </p:txBody>
@@ -4659,7 +5050,7 @@
                   <a:srgbClr val="0B3D2E"/>
                 </a:solidFill>
               </a:rPr>
-              <a:t>✍️ Ejercicios</a:t>
+              <a:t>📖 Definiciones y características</a:t>
             </a:r>
           </a:p>
         </p:txBody>
@@ -4697,82 +5088,97 @@
                   <a:srgbClr val="22282E"/>
                 </a:solidFill>
               </a:rPr>
-              <a:t>•  Dadas unas cabeceras, indica la IP de origen real y si el From: fue suplantado.</a:t>
-            </a:r>
-          </a:p>
-          <a:p>
-            <a:pPr>
-              <a:spcAft>
-                <a:spcPts val="600"/>
-              </a:spcAft>
-            </a:pPr>
-            <a:r>
-              <a:rPr sz="1500">
-                <a:solidFill>
-                  <a:srgbClr val="22282E"/>
-                </a:solidFill>
-              </a:rPr>
-              <a:t>•  Explica un caso donde SPF pasa pero DMARC falla, y por qué.</a:t>
-            </a:r>
-          </a:p>
-          <a:p>
-            <a:pPr>
-              <a:spcAft>
-                <a:spcPts val="600"/>
-              </a:spcAft>
-            </a:pPr>
-            <a:r>
-              <a:rPr sz="1500">
-                <a:solidFill>
-                  <a:srgbClr val="22282E"/>
-                </a:solidFill>
-              </a:rPr>
-              <a:t>•  Convierte tres URLs y dos IPs a formato defanged y decodifica una URL con parámetros en Base64 usando CyberChef.</a:t>
-            </a:r>
-          </a:p>
-          <a:p>
-            <a:pPr>
-              <a:spcAft>
-                <a:spcPts val="600"/>
-              </a:spcAft>
-            </a:pPr>
-            <a:r>
-              <a:rPr sz="1500">
-                <a:solidFill>
-                  <a:srgbClr val="22282E"/>
-                </a:solidFill>
-              </a:rPr>
-              <a:t>•  Compara microsoft.com con tres dominios lookalike y detéctalos vía punycode.</a:t>
-            </a:r>
-          </a:p>
-          <a:p>
-            <a:pPr>
-              <a:spcAft>
-                <a:spcPts val="600"/>
-              </a:spcAft>
-            </a:pPr>
-            <a:r>
-              <a:rPr sz="1500">
-                <a:solidFill>
-                  <a:srgbClr val="22282E"/>
-                </a:solidFill>
-              </a:rPr>
-              <a:t>•  Redacta el playbook de respuesta a un BEC que solicita un cambio de datos bancarios a un proveedor.</a:t>
-            </a:r>
-          </a:p>
-          <a:p>
-            <a:pPr>
-              <a:spcAft>
-                <a:spcPts val="600"/>
-              </a:spcAft>
-            </a:pPr>
-            <a:r>
-              <a:rPr sz="1500">
-                <a:solidFill>
-                  <a:srgbClr val="22282E"/>
-                </a:solidFill>
-              </a:rPr>
-              <a:t>•  Extrae los IOCs de una muestra y escríbelos en una tabla lista para importar a un bloqueo.</a:t>
+              <a:t>•  Cabeceras de correo: metadatos del mensaje. Received (saltos MTA, se leen de abajo hacia arriba), Return-Path (dónde rebotan), Authentication-Results (veredicto SPF/DKIM/DMARC), Message-ID.…</a:t>
+            </a:r>
+          </a:p>
+          <a:p>
+            <a:pPr>
+              <a:spcAft>
+                <a:spcPts val="600"/>
+              </a:spcAft>
+            </a:pPr>
+            <a:r>
+              <a:rPr sz="1500">
+                <a:solidFill>
+                  <a:srgbClr val="22282E"/>
+                </a:solidFill>
+              </a:rPr>
+              <a:t>•  SPF (Sender Policy Framework): registro DNS TXT que lista qué IPs pueden enviar por un dominio. Verifica el envelope-from (Return-Path). Característica clave: valida IP de envío, no el "De:" visible…</a:t>
+            </a:r>
+          </a:p>
+          <a:p>
+            <a:pPr>
+              <a:spcAft>
+                <a:spcPts val="600"/>
+              </a:spcAft>
+            </a:pPr>
+            <a:r>
+              <a:rPr sz="1500">
+                <a:solidFill>
+                  <a:srgbClr val="22282E"/>
+                </a:solidFill>
+              </a:rPr>
+              <a:t>•  DKIM (DomainKeys Identified Mail): firma criptográfica de partes del mensaje verificable con clave pública en DNS. Característica clave: prueba integridad y que el dominio firmante autorizó el envío.</a:t>
+            </a:r>
+          </a:p>
+          <a:p>
+            <a:pPr>
+              <a:spcAft>
+                <a:spcPts val="600"/>
+              </a:spcAft>
+            </a:pPr>
+            <a:r>
+              <a:rPr sz="1500">
+                <a:solidFill>
+                  <a:srgbClr val="22282E"/>
+                </a:solidFill>
+              </a:rPr>
+              <a:t>•  DMARC: política que alinea el dominio del "De:" visible con SPF y/o DKIM e indica qué hacer si falla (none/quarantine/reject), más reportes. Característica clave: cierra el hueco de SPF/DKIM al…</a:t>
+            </a:r>
+          </a:p>
+          <a:p>
+            <a:pPr>
+              <a:spcAft>
+                <a:spcPts val="600"/>
+              </a:spcAft>
+            </a:pPr>
+            <a:r>
+              <a:rPr sz="1500">
+                <a:solidFill>
+                  <a:srgbClr val="22282E"/>
+                </a:solidFill>
+              </a:rPr>
+              <a:t>•  Defanging: neutralizar un IOC para compartirlo sin riesgo de clic accidental: hxxp://malo[.]com, 1.2.3[.]4. Característica clave: seguridad al documentar.</a:t>
+            </a:r>
+          </a:p>
+          <a:p>
+            <a:pPr>
+              <a:spcAft>
+                <a:spcPts val="600"/>
+              </a:spcAft>
+            </a:pPr>
+            <a:r>
+              <a:rPr sz="1500">
+                <a:solidFill>
+                  <a:srgbClr val="22282E"/>
+                </a:solidFill>
+              </a:rPr>
+              <a:t>•  Homoglyph / lookalike domain: dominio visualmente similar (paypa1.com, rnicrosoft.com, IDN con cirílico). Característica clave: engaña la lectura rápida; se detecta con punycode/whois.</a:t>
+            </a:r>
+          </a:p>
+          <a:p>
+            <a:pPr>
+              <a:spcAft>
+                <a:spcPts val="600"/>
+              </a:spcAft>
+            </a:pPr>
+            <a:r>
+              <a:rPr sz="1500">
+                <a:solidFill>
+                  <a:srgbClr val="22282E"/>
+                </a:solidFill>
+              </a:rPr>
+              <a:t>•  BEC (Business Email Compromise): fraude sin malware que suplanta a un ejecutivo/proveedor para desviar pagos. Característica clave: alto impacto financiero, a menudo sin enlaces ni adjuntos, difícil…</a:t>
             </a:r>
           </a:p>
         </p:txBody>
@@ -4823,7 +5229,7 @@
                   <a:srgbClr val="0B3D2E"/>
                 </a:solidFill>
               </a:rPr>
-              <a:t>📝 Reto verificable</a:t>
+              <a:t>🧰 Herramientas y preparación</a:t>
             </a:r>
           </a:p>
         </p:txBody>
@@ -4861,97 +5267,97 @@
                   <a:srgbClr val="22282E"/>
                 </a:solidFill>
               </a:rPr>
-              <a:t>•  Reto: entrega el informe de análisis completo de un correo de phishing de muestra, con veredicto justificado, tabla de IOCs defanged y plan de respuesta.</a:t>
-            </a:r>
-          </a:p>
-          <a:p>
-            <a:pPr>
-              <a:spcAft>
-                <a:spcPts val="600"/>
-              </a:spcAft>
-            </a:pPr>
-            <a:r>
-              <a:rPr sz="1500">
-                <a:solidFill>
-                  <a:srgbClr val="22282E"/>
-                </a:solidFill>
-              </a:rPr>
-              <a:t>•  Criterio de aceptación:</a:t>
-            </a:r>
-          </a:p>
-          <a:p>
-            <a:pPr>
-              <a:spcAft>
-                <a:spcPts val="600"/>
-              </a:spcAft>
-            </a:pPr>
-            <a:r>
-              <a:rPr sz="1500">
-                <a:solidFill>
-                  <a:srgbClr val="22282E"/>
-                </a:solidFill>
-              </a:rPr>
-              <a:t>•  Se determina la IP/origen real desde las cabeceras y se contrasta From: vs Return-Path.</a:t>
-            </a:r>
-          </a:p>
-          <a:p>
-            <a:pPr>
-              <a:spcAft>
-                <a:spcPts val="600"/>
-              </a:spcAft>
-            </a:pPr>
-            <a:r>
-              <a:rPr sz="1500">
-                <a:solidFill>
-                  <a:srgbClr val="22282E"/>
-                </a:solidFill>
-              </a:rPr>
-              <a:t>•  Se interpretan correctamente SPF, DKIM y DMARC (incluyendo el caso "SPF pass pero DMARC fail").</a:t>
-            </a:r>
-          </a:p>
-          <a:p>
-            <a:pPr>
-              <a:spcAft>
-                <a:spcPts val="600"/>
-              </a:spcAft>
-            </a:pPr>
-            <a:r>
-              <a:rPr sz="1500">
-                <a:solidFill>
-                  <a:srgbClr val="22282E"/>
-                </a:solidFill>
-              </a:rPr>
-              <a:t>•  Todos los IOCs se presentan defanged; ningún enlace vivo en el informe.</a:t>
-            </a:r>
-          </a:p>
-          <a:p>
-            <a:pPr>
-              <a:spcAft>
-                <a:spcPts val="600"/>
-              </a:spcAft>
-            </a:pPr>
-            <a:r>
-              <a:rPr sz="1500">
-                <a:solidFill>
-                  <a:srgbClr val="22282E"/>
-                </a:solidFill>
-              </a:rPr>
-              <a:t>•  El plan de respuesta incluye contención (purga), bloqueo de IOCs y acción sobre usuarios afectados.</a:t>
-            </a:r>
-          </a:p>
-          <a:p>
-            <a:pPr>
-              <a:spcAft>
-                <a:spcPts val="600"/>
-              </a:spcAft>
-            </a:pPr>
-            <a:r>
-              <a:rPr sz="1500">
-                <a:solidFill>
-                  <a:srgbClr val="22282E"/>
-                </a:solidFill>
-              </a:rPr>
-              <a:t>•  El análisis de adjunto/URL se hizo en entorno aislado (queda documentado).</a:t>
+              <a:t>•  Laboratorio aislado para análisis seguro:</a:t>
+            </a:r>
+          </a:p>
+          <a:p>
+            <a:pPr>
+              <a:spcAft>
+                <a:spcPts val="600"/>
+              </a:spcAft>
+            </a:pPr>
+            <a:r>
+              <a:rPr sz="1500">
+                <a:solidFill>
+                  <a:srgbClr val="22282E"/>
+                </a:solidFill>
+              </a:rPr>
+              <a:t>•  VM aislada (VirtualBox/Hyper-V, red host-only o sin red) para detonar adjuntos.</a:t>
+            </a:r>
+          </a:p>
+          <a:p>
+            <a:pPr>
+              <a:spcAft>
+                <a:spcPts val="600"/>
+              </a:spcAft>
+            </a:pPr>
+            <a:r>
+              <a:rPr sz="1500">
+                <a:solidFill>
+                  <a:srgbClr val="22282E"/>
+                </a:solidFill>
+              </a:rPr>
+              <a:t>•  Análisis de cabeceras: Google Admin Toolbox Messageheader o MXToolbox; visor de .eml/.msg.</a:t>
+            </a:r>
+          </a:p>
+          <a:p>
+            <a:pPr>
+              <a:spcAft>
+                <a:spcPts val="600"/>
+              </a:spcAft>
+            </a:pPr>
+            <a:r>
+              <a:rPr sz="1500">
+                <a:solidFill>
+                  <a:srgbClr val="22282E"/>
+                </a:solidFill>
+              </a:rPr>
+              <a:t>•  URLs/archivos: VirusTotal, URLScan.io, Any.Run o [Joe Sandbox] para detonación en sandbox.</a:t>
+            </a:r>
+          </a:p>
+          <a:p>
+            <a:pPr>
+              <a:spcAft>
+                <a:spcPts val="600"/>
+              </a:spcAft>
+            </a:pPr>
+            <a:r>
+              <a:rPr sz="1500">
+                <a:solidFill>
+                  <a:srgbClr val="22282E"/>
+                </a:solidFill>
+              </a:rPr>
+              <a:t>•  Hashing: sha256sum / Get-FileHash para huella del adjunto (comparte el hash, no el archivo).</a:t>
+            </a:r>
+          </a:p>
+          <a:p>
+            <a:pPr>
+              <a:spcAft>
+                <a:spcPts val="600"/>
+              </a:spcAft>
+            </a:pPr>
+            <a:r>
+              <a:rPr sz="1500">
+                <a:solidFill>
+                  <a:srgbClr val="22282E"/>
+                </a:solidFill>
+              </a:rPr>
+              <a:t>•  Inspección de DNS: dig TXT dominio para leer SPF/DMARC; nslookup.</a:t>
+            </a:r>
+          </a:p>
+          <a:p>
+            <a:pPr>
+              <a:spcAft>
+                <a:spcPts val="600"/>
+              </a:spcAft>
+            </a:pPr>
+            <a:r>
+              <a:rPr sz="1500">
+                <a:solidFill>
+                  <a:srgbClr val="22282E"/>
+                </a:solidFill>
+              </a:rPr>
+              <a:t>•  Extracción: oletools (olevba) para macros de Office, pdfid/pdf-parser para PDFs, CyberChef para decodificar/defang.</a:t>
             </a:r>
           </a:p>
         </p:txBody>
